--- a/lecons/LSA/Climatology/LSA_CLIM_L13_Pressure_Systems.pptx
+++ b/lecons/LSA/Climatology/LSA_CLIM_L13_Pressure_Systems.pptx
@@ -3022,7 +3022,7 @@
           <a:p>
             <a:r>
               <a:rPr lang="en-US" dirty="0"/>
-              <a:t>Let us copy Meaning of Pressure Systems. Atmospheric pressure can be understood as follows. Write each point on a new line, with the key term first. When you finish, we go to the next slide.</a:t>
+              <a:t>Let us copy Meaning of Pressure Systems. Atmospheric pressure can be understood as follows. On this slide we have Atmospheric pressure. Write each point on a new line, with the key term first, and explain it in your own words when we revise. When you finish, we go to the next slide.</a:t>
             </a:r>
             <a:endParaRPr lang="en-US" dirty="0"/>
           </a:p>
@@ -3110,7 +3110,7 @@
           <a:p>
             <a:r>
               <a:rPr lang="en-US" dirty="0"/>
-              <a:t>We continue with the same part. Write each point on a new line, with the key term first.</a:t>
+              <a:t>We continue with Meaning of Pressure Systems. On this slide we have Pressure systems. Write each point on a new line, with the key term first, and explain it in your own words when we revise.</a:t>
             </a:r>
             <a:endParaRPr lang="en-US" dirty="0"/>
           </a:p>
@@ -3198,7 +3198,7 @@
           <a:p>
             <a:r>
               <a:rPr lang="en-US" dirty="0"/>
-              <a:t>Let us copy The Global Pressure Belts. The pressure belts of the world are. Write each point on a new line, with the key term first. When you finish, we go to the next slide.</a:t>
+              <a:t>Let us copy The Global Pressure Belts. The pressure belts of the world are. On this slide we have Equatorial low. Write each point on a new line, with the key term first, and explain it in your own words when we revise. When you finish, we go to the next slide.</a:t>
             </a:r>
             <a:endParaRPr lang="en-US" dirty="0"/>
           </a:p>
@@ -3286,7 +3286,7 @@
           <a:p>
             <a:r>
               <a:rPr lang="en-US" dirty="0"/>
-              <a:t>We continue with the same part. Write each point on a new line, with the key term first. When you finish, we go to the next slide.</a:t>
+              <a:t>We continue with The Global Pressure Belts. On this slide we have Subtropical highs. Write each point on a new line, with the key term first, and explain it in your own words when we revise. When you finish, we go to the next slide.</a:t>
             </a:r>
             <a:endParaRPr lang="en-US" dirty="0"/>
           </a:p>
@@ -3374,7 +3374,7 @@
           <a:p>
             <a:r>
               <a:rPr lang="en-US" dirty="0"/>
-              <a:t>We continue with the same part. Write each point on a new line, with the key term first.</a:t>
+              <a:t>We continue with The Global Pressure Belts. On this slide we have Subpolar lows and polar highs. Write each point on a new line, with the key term first, and explain it in your own words when we revise.</a:t>
             </a:r>
             <a:endParaRPr lang="en-US" dirty="0"/>
           </a:p>
@@ -3638,7 +3638,7 @@
           <a:p>
             <a:r>
               <a:rPr lang="en-US" dirty="0"/>
-              <a:t>Let us copy The Tricellular Model. The general circulation of the atmosphere is explained by three cells. Write each point on a new line, with the key term first. When you finish, we go to the next slide.</a:t>
+              <a:t>Let us copy The Tricellular Model. The general circulation of the atmosphere is explained by three cells. On this slide we have Hadley cell. Write each point on a new line, with the key term first, and explain it in your own words when we revise. When you finish, we go to the next slide.</a:t>
             </a:r>
             <a:endParaRPr lang="en-US" dirty="0"/>
           </a:p>
@@ -3726,7 +3726,7 @@
           <a:p>
             <a:r>
               <a:rPr lang="en-US" dirty="0"/>
-              <a:t>We continue with the same part. Write each point on a new line, with the key term first.</a:t>
+              <a:t>We continue with The Tricellular Model. On this slide we have Ferrel cell and Polar cell. Write each point on a new line, with the key term first, and explain it in your own words when we revise.</a:t>
             </a:r>
             <a:endParaRPr lang="en-US" dirty="0"/>
           </a:p>
@@ -3902,7 +3902,7 @@
           <a:p>
             <a:r>
               <a:rPr lang="en-US" dirty="0"/>
-              <a:t>Let us copy Emphasis on the Hadley Cell. The Hadley cell is the most important cell for tropical regions. Write each point on a new line, with the key term first. When you finish, we go to the next slide.</a:t>
+              <a:t>Let us copy Emphasis on the Hadley Cell. The Hadley cell is the most important cell for tropical regions. On this slide we have Rising limb. Write each point on a new line, with the key term first, and explain it in your own words when we revise. When you finish, we go to the next slide.</a:t>
             </a:r>
             <a:endParaRPr lang="en-US" dirty="0"/>
           </a:p>
@@ -3990,7 +3990,7 @@
           <a:p>
             <a:r>
               <a:rPr lang="en-US" dirty="0"/>
-              <a:t>We continue with the same part. Write each point on a new line, with the key term first.</a:t>
+              <a:t>We continue with Emphasis on the Hadley Cell. On this slide we have Sinking limb and Seasonal shift. Write each point on a new line, with the key term first, and explain it in your own words when we revise.</a:t>
             </a:r>
             <a:endParaRPr lang="en-US" dirty="0"/>
           </a:p>
@@ -5222,7 +5222,7 @@
           <a:p>
             <a:r>
               <a:rPr lang="en-US" dirty="0"/>
-              <a:t>Here is the plan of our lesson today. We shall correction of the homework; then objectives and recall; then real-life situation and action to take; then learning activities; then board summary; then evaluation, remediation and homework.</a:t>
+              <a:t>Here is the plan of our lesson today. First, we shall correct the homework. Then we shall look at the objectives and recall what you already know. After that, we shall study a situation from real life and the action to take, and do the learning activities. Finally, we shall copy the board summary, do the evaluation and the remediation, and I will give you the homework.</a:t>
             </a:r>
             <a:endParaRPr lang="en-US" dirty="0"/>
           </a:p>
@@ -6762,7 +6762,7 @@
                 <a:ea typeface="Times New Roman" pitchFamily="34" charset="-122"/>
                 <a:cs typeface="Times New Roman" pitchFamily="34" charset="-120"/>
               </a:rPr>
-              <a:t>Lesson 13: Pressure Systems</a:t>
+              <a:t>Lesson 13</a:t>
             </a:r>
             <a:endParaRPr lang="en-US" sz="2600" dirty="0"/>
           </a:p>
